--- a/diagrams/deployment_model.pptx
+++ b/diagrams/deployment_model.pptx
@@ -989,7 +989,7 @@
         </p:blipFill>
         <p:spPr>
           <a:xfrm>
-            <a:off x="3928044" y="2715768"/>
+            <a:off x="3790884" y="2852928"/>
             <a:ext cx="556392" cy="530352"/>
           </a:xfrm>
           <a:prstGeom prst="rect">
@@ -1013,7 +1013,7 @@
         </p:blipFill>
         <p:spPr>
           <a:xfrm>
-            <a:off x="3713086" y="2514600"/>
+            <a:off x="3639934" y="2560320"/>
             <a:ext cx="218212" cy="365760"/>
           </a:xfrm>
           <a:prstGeom prst="rect">
@@ -1037,7 +1037,7 @@
         </p:blipFill>
         <p:spPr>
           <a:xfrm>
-            <a:off x="4705284" y="3236976"/>
+            <a:off x="3013644" y="3584448"/>
             <a:ext cx="556392" cy="530352"/>
           </a:xfrm>
           <a:prstGeom prst="rect">
@@ -1450,9 +1450,38 @@
           </a:ln>
         </p:spPr>
       </p:sp>
+      <p:sp>
+        <p:nvSpPr>
+          <p:cNvPr id="25" name="Shape 11"/>
+          <p:cNvSpPr/>
+          <p:nvPr/>
+        </p:nvSpPr>
+        <p:spPr>
+          <a:xfrm rot="-2931521">
+            <a:off x="3714841" y="1192847"/>
+            <a:ext cx="274320" cy="1900464"/>
+          </a:xfrm>
+          <a:prstGeom prst="triangle">
+            <a:avLst/>
+          </a:prstGeom>
+          <a:solidFill>
+            <a:srgbClr val="0073BA">
+              <a:alpha val="45000"/>
+            </a:srgbClr>
+          </a:solidFill>
+          <a:ln w="9525">
+            <a:solidFill>
+              <a:srgbClr val="0073BA">
+                <a:alpha val="75000"/>
+              </a:srgbClr>
+            </a:solidFill>
+            <a:prstDash val="solid"/>
+          </a:ln>
+        </p:spPr>
+      </p:sp>
       <p:pic>
         <p:nvPicPr>
-          <p:cNvPr id="25" name="Image 12" descr="preencoded.png">    </p:cNvPr>
+          <p:cNvPr id="26" name="Image 12" descr="preencoded.png">    </p:cNvPr>
           <p:cNvPicPr>
             <a:picLocks noChangeAspect="1"/>
           </p:cNvPicPr>
@@ -1476,7 +1505,7 @@
       </p:pic>
       <p:pic>
         <p:nvPicPr>
-          <p:cNvPr id="26" name="Image 13" descr="preencoded.png">    </p:cNvPr>
+          <p:cNvPr id="27" name="Image 13" descr="preencoded.png">    </p:cNvPr>
           <p:cNvPicPr>
             <a:picLocks noChangeAspect="1"/>
           </p:cNvPicPr>
@@ -1500,7 +1529,7 @@
       </p:pic>
       <p:pic>
         <p:nvPicPr>
-          <p:cNvPr id="27" name="Image 14" descr="preencoded.png">    </p:cNvPr>
+          <p:cNvPr id="28" name="Image 14" descr="preencoded.png">    </p:cNvPr>
           <p:cNvPicPr>
             <a:picLocks noChangeAspect="1"/>
           </p:cNvPicPr>
@@ -1524,7 +1553,7 @@
       </p:pic>
       <p:sp>
         <p:nvSpPr>
-          <p:cNvPr id="28" name="Shape 11"/>
+          <p:cNvPr id="29" name="Shape 12"/>
           <p:cNvSpPr/>
           <p:nvPr/>
         </p:nvSpPr>
@@ -1544,7 +1573,7 @@
       </p:sp>
       <p:pic>
         <p:nvPicPr>
-          <p:cNvPr id="29" name="Image 15" descr="preencoded.png">    </p:cNvPr>
+          <p:cNvPr id="30" name="Image 15" descr="preencoded.png">    </p:cNvPr>
           <p:cNvPicPr>
             <a:picLocks noChangeAspect="1"/>
           </p:cNvPicPr>
@@ -1568,7 +1597,7 @@
       </p:pic>
       <p:pic>
         <p:nvPicPr>
-          <p:cNvPr id="30" name="Image 16" descr="preencoded.png">    </p:cNvPr>
+          <p:cNvPr id="31" name="Image 16" descr="preencoded.png">    </p:cNvPr>
           <p:cNvPicPr>
             <a:picLocks noChangeAspect="1"/>
           </p:cNvPicPr>
@@ -1592,7 +1621,7 @@
       </p:pic>
       <p:pic>
         <p:nvPicPr>
-          <p:cNvPr id="31" name="Image 17" descr="preencoded.png">    </p:cNvPr>
+          <p:cNvPr id="32" name="Image 17" descr="preencoded.png">    </p:cNvPr>
           <p:cNvPicPr>
             <a:picLocks noChangeAspect="1"/>
           </p:cNvPicPr>
@@ -1606,6 +1635,54 @@
         </p:blipFill>
         <p:spPr>
           <a:xfrm>
+            <a:off x="4522404" y="3081528"/>
+            <a:ext cx="556392" cy="530352"/>
+          </a:xfrm>
+          <a:prstGeom prst="rect">
+            <a:avLst/>
+          </a:prstGeom>
+        </p:spPr>
+      </p:pic>
+      <p:pic>
+        <p:nvPicPr>
+          <p:cNvPr id="33" name="Image 18" descr="preencoded.png">    </p:cNvPr>
+          <p:cNvPicPr>
+            <a:picLocks noChangeAspect="1"/>
+          </p:cNvPicPr>
+          <p:nvPr/>
+        </p:nvPicPr>
+        <p:blipFill>
+          <a:blip r:embed="rId19"/>
+          <a:stretch>
+            <a:fillRect/>
+          </a:stretch>
+        </p:blipFill>
+        <p:spPr>
+          <a:xfrm>
+            <a:off x="4644468" y="2779776"/>
+            <a:ext cx="312264" cy="329184"/>
+          </a:xfrm>
+          <a:prstGeom prst="rect">
+            <a:avLst/>
+          </a:prstGeom>
+        </p:spPr>
+      </p:pic>
+      <p:pic>
+        <p:nvPicPr>
+          <p:cNvPr id="34" name="Image 19" descr="preencoded.png">    </p:cNvPr>
+          <p:cNvPicPr>
+            <a:picLocks noChangeAspect="1"/>
+          </p:cNvPicPr>
+          <p:nvPr/>
+        </p:nvPicPr>
+        <p:blipFill>
+          <a:blip r:embed="rId20"/>
+          <a:stretch>
+            <a:fillRect/>
+          </a:stretch>
+        </p:blipFill>
+        <p:spPr>
+          <a:xfrm>
             <a:off x="869758" y="3429000"/>
             <a:ext cx="637924" cy="347472"/>
           </a:xfrm>
@@ -1616,7 +1693,7 @@
       </p:pic>
       <p:sp>
         <p:nvSpPr>
-          <p:cNvPr id="32" name="Text 12"/>
+          <p:cNvPr id="35" name="Text 13"/>
           <p:cNvSpPr/>
           <p:nvPr/>
         </p:nvSpPr>
@@ -1655,7 +1732,7 @@
       </p:sp>
       <p:sp>
         <p:nvSpPr>
-          <p:cNvPr id="33" name="Text 13"/>
+          <p:cNvPr id="36" name="Text 14"/>
           <p:cNvSpPr/>
           <p:nvPr/>
         </p:nvSpPr>
@@ -1694,7 +1771,7 @@
       </p:sp>
       <p:sp>
         <p:nvSpPr>
-          <p:cNvPr id="34" name="Text 14"/>
+          <p:cNvPr id="37" name="Text 15"/>
           <p:cNvSpPr/>
           <p:nvPr/>
         </p:nvSpPr>
@@ -1733,7 +1810,7 @@
       </p:sp>
       <p:sp>
         <p:nvSpPr>
-          <p:cNvPr id="35" name="Text 15"/>
+          <p:cNvPr id="38" name="Text 16"/>
           <p:cNvSpPr/>
           <p:nvPr/>
         </p:nvSpPr>
@@ -1772,7 +1849,7 @@
       </p:sp>
       <p:sp>
         <p:nvSpPr>
-          <p:cNvPr id="36" name="Text 16"/>
+          <p:cNvPr id="39" name="Text 17"/>
           <p:cNvSpPr/>
           <p:nvPr/>
         </p:nvSpPr>
@@ -1811,7 +1888,7 @@
       </p:sp>
       <p:sp>
         <p:nvSpPr>
-          <p:cNvPr id="37" name="Text 17"/>
+          <p:cNvPr id="40" name="Text 18"/>
           <p:cNvSpPr/>
           <p:nvPr/>
         </p:nvSpPr>
@@ -1850,7 +1927,7 @@
       </p:sp>
       <p:sp>
         <p:nvSpPr>
-          <p:cNvPr id="38" name="Text 18"/>
+          <p:cNvPr id="41" name="Text 19"/>
           <p:cNvSpPr/>
           <p:nvPr/>
         </p:nvSpPr>
@@ -1889,7 +1966,7 @@
       </p:sp>
       <p:sp>
         <p:nvSpPr>
-          <p:cNvPr id="39" name="Text 19"/>
+          <p:cNvPr id="42" name="Text 20"/>
           <p:cNvSpPr/>
           <p:nvPr/>
         </p:nvSpPr>
@@ -1926,16 +2003,285 @@
           </a:p>
         </p:txBody>
       </p:sp>
+      <p:sp>
+        <p:nvSpPr>
+          <p:cNvPr id="43" name="Text 21"/>
+          <p:cNvSpPr/>
+          <p:nvPr/>
+        </p:nvSpPr>
+        <p:spPr>
+          <a:xfrm>
+            <a:off x="4251960" y="3657600"/>
+            <a:ext cx="1097280" cy="201168"/>
+          </a:xfrm>
+          <a:prstGeom prst="rect">
+            <a:avLst/>
+          </a:prstGeom>
+          <a:noFill/>
+          <a:ln/>
+        </p:spPr>
+        <p:txBody>
+          <a:bodyPr wrap="square" lIns="0" tIns="0" rIns="0" bIns="0" rtlCol="0" anchor="ctr"/>
+          <a:lstStyle/>
+          <a:p>
+            <a:pPr algn="ctr" indent="0" marL="0">
+              <a:buNone/>
+            </a:pPr>
+            <a:r>
+              <a:rPr lang="en-US" sz="1200" b="1" dirty="0">
+                <a:solidFill>
+                  <a:srgbClr val="1A1A1A"/>
+                </a:solidFill>
+                <a:latin typeface="Times New Roman" pitchFamily="34" charset="0"/>
+                <a:ea typeface="Times New Roman" pitchFamily="34" charset="-122"/>
+                <a:cs typeface="Times New Roman" pitchFamily="34" charset="-120"/>
+              </a:rPr>
+              <a:t>FWA CPE</a:t>
+            </a:r>
+            <a:endParaRPr lang="en-US" sz="1200" dirty="0"/>
+          </a:p>
+        </p:txBody>
+      </p:sp>
+      <p:sp>
+        <p:nvSpPr>
+          <p:cNvPr id="44" name="Text 22"/>
+          <p:cNvSpPr/>
+          <p:nvPr/>
+        </p:nvSpPr>
+        <p:spPr>
+          <a:xfrm>
+            <a:off x="274320" y="237744"/>
+            <a:ext cx="2011680" cy="201168"/>
+          </a:xfrm>
+          <a:prstGeom prst="rect">
+            <a:avLst/>
+          </a:prstGeom>
+          <a:noFill/>
+          <a:ln/>
+        </p:spPr>
+        <p:txBody>
+          <a:bodyPr wrap="square" lIns="0" tIns="0" rIns="0" bIns="0" rtlCol="0" anchor="ctr"/>
+          <a:lstStyle/>
+          <a:p>
+            <a:pPr algn="ctr" indent="0" marL="0">
+              <a:buNone/>
+            </a:pPr>
+            <a:r>
+              <a:rPr lang="en-US" sz="1100" b="1" dirty="0">
+                <a:solidFill>
+                  <a:srgbClr val="1A1A1A"/>
+                </a:solidFill>
+                <a:latin typeface="Times New Roman" pitchFamily="34" charset="0"/>
+                <a:ea typeface="Times New Roman" pitchFamily="34" charset="-122"/>
+                <a:cs typeface="Times New Roman" pitchFamily="34" charset="-120"/>
+              </a:rPr>
+              <a:t>Orthogonal OFDMA sub-bands</a:t>
+            </a:r>
+            <a:endParaRPr lang="en-US" sz="1100" dirty="0"/>
+          </a:p>
+        </p:txBody>
+      </p:sp>
+      <p:sp>
+        <p:nvSpPr>
+          <p:cNvPr id="45" name="Shape 23"/>
+          <p:cNvSpPr/>
+          <p:nvPr/>
+        </p:nvSpPr>
+        <p:spPr>
+          <a:xfrm>
+            <a:off x="365760" y="493776"/>
+            <a:ext cx="841248" cy="192024"/>
+          </a:xfrm>
+          <a:prstGeom prst="rect">
+            <a:avLst/>
+          </a:prstGeom>
+          <a:solidFill>
+            <a:srgbClr val="3A4750"/>
+          </a:solidFill>
+          <a:ln w="6350">
+            <a:solidFill>
+              <a:srgbClr val="1A1A1A"/>
+            </a:solidFill>
+            <a:prstDash val="solid"/>
+          </a:ln>
+        </p:spPr>
+      </p:sp>
+      <p:sp>
+        <p:nvSpPr>
+          <p:cNvPr id="46" name="Shape 24"/>
+          <p:cNvSpPr/>
+          <p:nvPr/>
+        </p:nvSpPr>
+        <p:spPr>
+          <a:xfrm>
+            <a:off x="1261872" y="493776"/>
+            <a:ext cx="932688" cy="192024"/>
+          </a:xfrm>
+          <a:prstGeom prst="rect">
+            <a:avLst/>
+          </a:prstGeom>
+          <a:solidFill>
+            <a:srgbClr val="0073BA"/>
+          </a:solidFill>
+          <a:ln w="6350">
+            <a:solidFill>
+              <a:srgbClr val="1A1A1A"/>
+            </a:solidFill>
+            <a:prstDash val="solid"/>
+          </a:ln>
+        </p:spPr>
+      </p:sp>
+      <p:sp>
+        <p:nvSpPr>
+          <p:cNvPr id="47" name="Text 25"/>
+          <p:cNvSpPr/>
+          <p:nvPr/>
+        </p:nvSpPr>
+        <p:spPr>
+          <a:xfrm>
+            <a:off x="256032" y="704088"/>
+            <a:ext cx="1060704" cy="182880"/>
+          </a:xfrm>
+          <a:prstGeom prst="rect">
+            <a:avLst/>
+          </a:prstGeom>
+          <a:noFill/>
+          <a:ln/>
+        </p:spPr>
+        <p:txBody>
+          <a:bodyPr wrap="square" lIns="0" tIns="0" rIns="0" bIns="0" rtlCol="0" anchor="ctr"/>
+          <a:lstStyle/>
+          <a:p>
+            <a:pPr algn="ctr" indent="0" marL="0">
+              <a:buNone/>
+            </a:pPr>
+            <a:r>
+              <a:rPr lang="en-US" sz="950" dirty="0">
+                <a:solidFill>
+                  <a:srgbClr val="1A1A1A"/>
+                </a:solidFill>
+                <a:latin typeface="Times New Roman" pitchFamily="34" charset="0"/>
+                <a:ea typeface="Times New Roman" pitchFamily="34" charset="-122"/>
+                <a:cs typeface="Times New Roman" pitchFamily="34" charset="-120"/>
+              </a:rPr>
+              <a:t>cellular UEs</a:t>
+            </a:r>
+            <a:endParaRPr lang="en-US" sz="950" dirty="0"/>
+          </a:p>
+        </p:txBody>
+      </p:sp>
+      <p:sp>
+        <p:nvSpPr>
+          <p:cNvPr id="48" name="Text 26"/>
+          <p:cNvSpPr/>
+          <p:nvPr/>
+        </p:nvSpPr>
+        <p:spPr>
+          <a:xfrm>
+            <a:off x="1216152" y="704088"/>
+            <a:ext cx="1024128" cy="182880"/>
+          </a:xfrm>
+          <a:prstGeom prst="rect">
+            <a:avLst/>
+          </a:prstGeom>
+          <a:noFill/>
+          <a:ln/>
+        </p:spPr>
+        <p:txBody>
+          <a:bodyPr wrap="square" lIns="0" tIns="0" rIns="0" bIns="0" rtlCol="0" anchor="ctr"/>
+          <a:lstStyle/>
+          <a:p>
+            <a:pPr algn="ctr" indent="0" marL="0">
+              <a:buNone/>
+            </a:pPr>
+            <a:r>
+              <a:rPr lang="en-US" sz="950" dirty="0">
+                <a:solidFill>
+                  <a:srgbClr val="1A1A1A"/>
+                </a:solidFill>
+                <a:latin typeface="Times New Roman" pitchFamily="34" charset="0"/>
+                <a:ea typeface="Times New Roman" pitchFamily="34" charset="-122"/>
+                <a:cs typeface="Times New Roman" pitchFamily="34" charset="-120"/>
+              </a:rPr>
+              <a:t>FWA CPEs</a:t>
+            </a:r>
+            <a:endParaRPr lang="en-US" sz="950" dirty="0"/>
+          </a:p>
+        </p:txBody>
+      </p:sp>
+      <p:sp>
+        <p:nvSpPr>
+          <p:cNvPr id="49" name="Shape 27"/>
+          <p:cNvSpPr/>
+          <p:nvPr/>
+        </p:nvSpPr>
+        <p:spPr>
+          <a:xfrm>
+            <a:off x="365760" y="960120"/>
+            <a:ext cx="1828800" cy="0"/>
+          </a:xfrm>
+          <a:prstGeom prst="line">
+            <a:avLst/>
+          </a:prstGeom>
+          <a:noFill/>
+          <a:ln w="9525">
+            <a:solidFill>
+              <a:srgbClr val="1A1A1A"/>
+            </a:solidFill>
+            <a:prstDash val="solid"/>
+            <a:tailEnd type="triangle"/>
+          </a:ln>
+        </p:spPr>
+      </p:sp>
+      <p:sp>
+        <p:nvSpPr>
+          <p:cNvPr id="50" name="Text 28"/>
+          <p:cNvSpPr/>
+          <p:nvPr/>
+        </p:nvSpPr>
+        <p:spPr>
+          <a:xfrm>
+            <a:off x="365760" y="978408"/>
+            <a:ext cx="1828800" cy="182880"/>
+          </a:xfrm>
+          <a:prstGeom prst="rect">
+            <a:avLst/>
+          </a:prstGeom>
+          <a:noFill/>
+          <a:ln/>
+        </p:spPr>
+        <p:txBody>
+          <a:bodyPr wrap="square" lIns="0" tIns="0" rIns="0" bIns="0" rtlCol="0" anchor="ctr"/>
+          <a:lstStyle/>
+          <a:p>
+            <a:pPr algn="ctr" indent="0" marL="0">
+              <a:buNone/>
+            </a:pPr>
+            <a:r>
+              <a:rPr lang="en-US" sz="950" i="1" dirty="0">
+                <a:solidFill>
+                  <a:srgbClr val="1A1A1A"/>
+                </a:solidFill>
+                <a:latin typeface="Times New Roman" pitchFamily="34" charset="0"/>
+                <a:ea typeface="Times New Roman" pitchFamily="34" charset="-122"/>
+                <a:cs typeface="Times New Roman" pitchFamily="34" charset="-120"/>
+              </a:rPr>
+              <a:t>frequency</a:t>
+            </a:r>
+            <a:endParaRPr lang="en-US" sz="950" dirty="0"/>
+          </a:p>
+        </p:txBody>
+      </p:sp>
       <p:pic>
         <p:nvPicPr>
-          <p:cNvPr id="40" name="Image 18" descr="preencoded.png">    </p:cNvPr>
+          <p:cNvPr id="51" name="Image 20" descr="preencoded.png">    </p:cNvPr>
           <p:cNvPicPr>
             <a:picLocks noChangeAspect="1"/>
           </p:cNvPicPr>
           <p:nvPr/>
         </p:nvPicPr>
         <p:blipFill>
-          <a:blip r:embed="rId19"/>
+          <a:blip r:embed="rId21"/>
           <a:stretch>
             <a:fillRect/>
           </a:stretch>
@@ -1952,7 +2298,7 @@
       </p:pic>
       <p:sp>
         <p:nvSpPr>
-          <p:cNvPr id="41" name="Text 20"/>
+          <p:cNvPr id="52" name="Text 29"/>
           <p:cNvSpPr/>
           <p:nvPr/>
         </p:nvSpPr>
@@ -1991,14 +2337,14 @@
       </p:sp>
       <p:pic>
         <p:nvPicPr>
-          <p:cNvPr id="42" name="Image 19" descr="preencoded.png">    </p:cNvPr>
+          <p:cNvPr id="53" name="Image 21" descr="preencoded.png">    </p:cNvPr>
           <p:cNvPicPr>
             <a:picLocks noChangeAspect="1"/>
           </p:cNvPicPr>
           <p:nvPr/>
         </p:nvPicPr>
         <p:blipFill>
-          <a:blip r:embed="rId20"/>
+          <a:blip r:embed="rId22"/>
           <a:stretch>
             <a:fillRect/>
           </a:stretch>
@@ -2015,7 +2361,7 @@
       </p:pic>
       <p:sp>
         <p:nvSpPr>
-          <p:cNvPr id="43" name="Text 21"/>
+          <p:cNvPr id="54" name="Text 30"/>
           <p:cNvSpPr/>
           <p:nvPr/>
         </p:nvSpPr>
@@ -2054,14 +2400,14 @@
       </p:sp>
       <p:pic>
         <p:nvPicPr>
-          <p:cNvPr id="44" name="Image 20" descr="preencoded.png">    </p:cNvPr>
+          <p:cNvPr id="55" name="Image 22" descr="preencoded.png">    </p:cNvPr>
           <p:cNvPicPr>
             <a:picLocks noChangeAspect="1"/>
           </p:cNvPicPr>
           <p:nvPr/>
         </p:nvPicPr>
         <p:blipFill>
-          <a:blip r:embed="rId21"/>
+          <a:blip r:embed="rId23"/>
           <a:stretch>
             <a:fillRect/>
           </a:stretch>
@@ -2078,7 +2424,7 @@
       </p:pic>
       <p:sp>
         <p:nvSpPr>
-          <p:cNvPr id="45" name="Text 22"/>
+          <p:cNvPr id="56" name="Text 31"/>
           <p:cNvSpPr/>
           <p:nvPr/>
         </p:nvSpPr>
@@ -2117,14 +2463,14 @@
       </p:sp>
       <p:pic>
         <p:nvPicPr>
-          <p:cNvPr id="46" name="Image 21" descr="preencoded.png">    </p:cNvPr>
+          <p:cNvPr id="57" name="Image 23" descr="preencoded.png">    </p:cNvPr>
           <p:cNvPicPr>
             <a:picLocks noChangeAspect="1"/>
           </p:cNvPicPr>
           <p:nvPr/>
         </p:nvPicPr>
         <p:blipFill>
-          <a:blip r:embed="rId22"/>
+          <a:blip r:embed="rId24"/>
           <a:stretch>
             <a:fillRect/>
           </a:stretch>
@@ -2141,7 +2487,7 @@
       </p:pic>
       <p:sp>
         <p:nvSpPr>
-          <p:cNvPr id="47" name="Text 23"/>
+          <p:cNvPr id="58" name="Text 32"/>
           <p:cNvSpPr/>
           <p:nvPr/>
         </p:nvSpPr>
@@ -2180,14 +2526,14 @@
       </p:sp>
       <p:pic>
         <p:nvPicPr>
-          <p:cNvPr id="48" name="Image 22" descr="preencoded.png">    </p:cNvPr>
+          <p:cNvPr id="59" name="Image 24" descr="preencoded.png">    </p:cNvPr>
           <p:cNvPicPr>
             <a:picLocks noChangeAspect="1"/>
           </p:cNvPicPr>
           <p:nvPr/>
         </p:nvPicPr>
         <p:blipFill>
-          <a:blip r:embed="rId23"/>
+          <a:blip r:embed="rId25"/>
           <a:stretch>
             <a:fillRect/>
           </a:stretch>
@@ -2204,7 +2550,7 @@
       </p:pic>
       <p:sp>
         <p:nvSpPr>
-          <p:cNvPr id="49" name="Text 24"/>
+          <p:cNvPr id="60" name="Text 33"/>
           <p:cNvSpPr/>
           <p:nvPr/>
         </p:nvSpPr>
@@ -2243,14 +2589,14 @@
       </p:sp>
       <p:pic>
         <p:nvPicPr>
-          <p:cNvPr id="50" name="Image 23" descr="preencoded.png">    </p:cNvPr>
+          <p:cNvPr id="61" name="Image 25" descr="preencoded.png">    </p:cNvPr>
           <p:cNvPicPr>
             <a:picLocks noChangeAspect="1"/>
           </p:cNvPicPr>
           <p:nvPr/>
         </p:nvPicPr>
         <p:blipFill>
-          <a:blip r:embed="rId24"/>
+          <a:blip r:embed="rId26"/>
           <a:stretch>
             <a:fillRect/>
           </a:stretch>
@@ -2267,7 +2613,7 @@
       </p:pic>
       <p:sp>
         <p:nvSpPr>
-          <p:cNvPr id="51" name="Text 25"/>
+          <p:cNvPr id="62" name="Text 34"/>
           <p:cNvSpPr/>
           <p:nvPr/>
         </p:nvSpPr>
@@ -2306,14 +2652,14 @@
       </p:sp>
       <p:pic>
         <p:nvPicPr>
-          <p:cNvPr id="52" name="Image 24" descr="preencoded.png">    </p:cNvPr>
+          <p:cNvPr id="63" name="Image 26" descr="preencoded.png">    </p:cNvPr>
           <p:cNvPicPr>
             <a:picLocks noChangeAspect="1"/>
           </p:cNvPicPr>
           <p:nvPr/>
         </p:nvPicPr>
         <p:blipFill>
-          <a:blip r:embed="rId25"/>
+          <a:blip r:embed="rId27"/>
           <a:stretch>
             <a:fillRect/>
           </a:stretch>
@@ -2330,7 +2676,7 @@
       </p:pic>
       <p:sp>
         <p:nvSpPr>
-          <p:cNvPr id="53" name="Text 26"/>
+          <p:cNvPr id="64" name="Text 35"/>
           <p:cNvSpPr/>
           <p:nvPr/>
         </p:nvSpPr>

--- a/diagrams/deployment_model.pptx
+++ b/diagrams/deployment_model.pptx
@@ -4,14 +4,14 @@
   <p:sldMasterIdLst>
     <p:sldMasterId id="2147483648" r:id="rId1"/>
   </p:sldMasterIdLst>
+  <p:notesMasterIdLst>
+    <p:notesMasterId r:id="rId3"/>
+  </p:notesMasterIdLst>
   <p:sldIdLst>
     <p:sldId id="256" r:id="rId2"/>
   </p:sldIdLst>
-  <p:notesMasterIdLst>
-    <p:notesMasterId r:id="rId3"/>
-  </p:notesMasterIdLst>
-  <p:sldSz cx="12188952" cy="5074920"/>
-  <p:notesSz cx="5074920" cy="12188952"/>
+  <p:sldSz cx="12188825" cy="5075238"/>
+  <p:notesSz cx="5075238" cy="12188825"/>
   <p:defaultTextStyle>
     <a:lvl1pPr marL="0" algn="l" defTabSz="914400" rtl="0" eaLnBrk="1" latinLnBrk="0" hangingPunct="1">
       <a:defRPr sz="1800" kern="1200">
@@ -104,6 +104,11 @@
       </a:defRPr>
     </a:lvl9pPr>
   </p:defaultTextStyle>
+  <p:extLst>
+    <p:ext uri="{EFAFB233-063F-42B5-8137-9DF3F51BA10A}">
+      <p15:sldGuideLst xmlns:p15="http://schemas.microsoft.com/office/powerpoint/2012/main"/>
+    </p:ext>
+  </p:extLst>
 </p:presentation>
 </file>
 
@@ -129,234 +134,10 @@
           <a:chExt cx="0" cy="0"/>
         </a:xfrm>
       </p:grpSpPr>
-      <p:sp>
-        <p:nvSpPr>
-          <p:cNvPr id="2" name="Header Placeholder 1"/>
-          <p:cNvSpPr>
-            <a:spLocks noGrp="1"/>
-          </p:cNvSpPr>
-          <p:nvPr>
-            <p:ph type="hdr" sz="quarter"/>
-          </p:nvPr>
-        </p:nvSpPr>
-        <p:spPr>
-          <a:xfrm>
-            <a:off x="0" y="0"/>
-            <a:ext cx="2971800" cy="458788"/>
-          </a:xfrm>
-          <a:prstGeom prst="rect">
-            <a:avLst/>
-          </a:prstGeom>
-        </p:spPr>
-        <p:txBody>
-          <a:bodyPr vert="horz" lIns="91440" tIns="45720" rIns="91440" bIns="45720" rtlCol="0"/>
-          <a:lstStyle>
-            <a:lvl1pPr algn="l">
-              <a:defRPr sz="1200"/>
-            </a:lvl1pPr>
-          </a:lstStyle>
-          <a:p>
-            <a:endParaRPr lang="en-US"/>
-          </a:p>
-        </p:txBody>
-      </p:sp>
-      <p:sp>
-        <p:nvSpPr>
-          <p:cNvPr id="3" name="Date Placeholder 2"/>
-          <p:cNvSpPr>
-            <a:spLocks noGrp="1"/>
-          </p:cNvSpPr>
-          <p:nvPr>
-            <p:ph type="dt" idx="1"/>
-          </p:nvPr>
-        </p:nvSpPr>
-        <p:spPr>
-          <a:xfrm>
-            <a:off x="3884613" y="0"/>
-            <a:ext cx="2971800" cy="458788"/>
-          </a:xfrm>
-          <a:prstGeom prst="rect">
-            <a:avLst/>
-          </a:prstGeom>
-        </p:spPr>
-        <p:txBody>
-          <a:bodyPr vert="horz" lIns="91440" tIns="45720" rIns="91440" bIns="45720" rtlCol="0"/>
-          <a:lstStyle>
-            <a:lvl1pPr algn="r">
-              <a:defRPr sz="1200"/>
-            </a:lvl1pPr>
-          </a:lstStyle>
-          <a:p>
-            <a:fld id="{5282F153-3F37-0F45-9E97-73ACFA13230C}" type="datetimeFigureOut">
-              <a:rPr lang="en-US"/>
-              <a:t>7/23/19</a:t>
-            </a:fld>
-            <a:endParaRPr lang="en-US"/>
-          </a:p>
-        </p:txBody>
-      </p:sp>
-      <p:sp>
-        <p:nvSpPr>
-          <p:cNvPr id="4" name="Slide Image Placeholder 3"/>
-          <p:cNvSpPr>
-            <a:spLocks noGrp="1" noRot="1" noChangeAspect="1"/>
-          </p:cNvSpPr>
-          <p:nvPr>
-            <p:ph type="sldImg" idx="2"/>
-          </p:nvPr>
-        </p:nvSpPr>
-        <p:spPr>
-          <a:xfrm>
-            <a:off x="685800" y="1143000"/>
-            <a:ext cx="5486400" cy="3086100"/>
-          </a:xfrm>
-          <a:prstGeom prst="rect">
-            <a:avLst/>
-          </a:prstGeom>
-          <a:noFill/>
-          <a:ln w="12700">
-            <a:solidFill>
-              <a:prstClr val="black"/>
-            </a:solidFill>
-          </a:ln>
-        </p:spPr>
-        <p:txBody>
-          <a:bodyPr vert="horz" lIns="91440" tIns="45720" rIns="91440" bIns="45720" rtlCol="0" anchor="ctr"/>
-          <a:lstStyle/>
-          <a:p>
-            <a:endParaRPr lang="en-US"/>
-          </a:p>
-        </p:txBody>
-      </p:sp>
-      <p:sp>
-        <p:nvSpPr>
-          <p:cNvPr id="5" name="Notes Placeholder 4"/>
-          <p:cNvSpPr>
-            <a:spLocks noGrp="1"/>
-          </p:cNvSpPr>
-          <p:nvPr>
-            <p:ph type="body" sz="quarter" idx="3"/>
-          </p:nvPr>
-        </p:nvSpPr>
-        <p:spPr>
-          <a:xfrm>
-            <a:off x="685800" y="4400550"/>
-            <a:ext cx="5486400" cy="3600450"/>
-          </a:xfrm>
-          <a:prstGeom prst="rect">
-            <a:avLst/>
-          </a:prstGeom>
-        </p:spPr>
-        <p:txBody>
-          <a:bodyPr vert="horz" lIns="91440" tIns="45720" rIns="91440" bIns="45720" rtlCol="0"/>
-          <a:lstStyle/>
-          <a:p>
-            <a:pPr lvl="0"/>
-            <a:r>
-              <a:rPr lang="en-US"/>
-              <a:t>Click to edit Master text styles</a:t>
-            </a:r>
-          </a:p>
-          <a:p>
-            <a:pPr lvl="1"/>
-            <a:r>
-              <a:rPr lang="en-US"/>
-              <a:t>Second level</a:t>
-            </a:r>
-          </a:p>
-          <a:p>
-            <a:pPr lvl="2"/>
-            <a:r>
-              <a:rPr lang="en-US"/>
-              <a:t>Third level</a:t>
-            </a:r>
-          </a:p>
-          <a:p>
-            <a:pPr lvl="3"/>
-            <a:r>
-              <a:rPr lang="en-US"/>
-              <a:t>Fourth level</a:t>
-            </a:r>
-          </a:p>
-          <a:p>
-            <a:pPr lvl="4"/>
-            <a:r>
-              <a:rPr lang="en-US"/>
-              <a:t>Fifth level</a:t>
-            </a:r>
-          </a:p>
-        </p:txBody>
-      </p:sp>
-      <p:sp>
-        <p:nvSpPr>
-          <p:cNvPr id="6" name="Footer Placeholder 5"/>
-          <p:cNvSpPr>
-            <a:spLocks noGrp="1"/>
-          </p:cNvSpPr>
-          <p:nvPr>
-            <p:ph type="ftr" sz="quarter" idx="4"/>
-          </p:nvPr>
-        </p:nvSpPr>
-        <p:spPr>
-          <a:xfrm>
-            <a:off x="0" y="8685213"/>
-            <a:ext cx="2971800" cy="458787"/>
-          </a:xfrm>
-          <a:prstGeom prst="rect">
-            <a:avLst/>
-          </a:prstGeom>
-        </p:spPr>
-        <p:txBody>
-          <a:bodyPr vert="horz" lIns="91440" tIns="45720" rIns="91440" bIns="45720" rtlCol="0" anchor="b"/>
-          <a:lstStyle>
-            <a:lvl1pPr algn="l">
-              <a:defRPr sz="1200"/>
-            </a:lvl1pPr>
-          </a:lstStyle>
-          <a:p>
-            <a:endParaRPr lang="en-US"/>
-          </a:p>
-        </p:txBody>
-      </p:sp>
-      <p:sp>
-        <p:nvSpPr>
-          <p:cNvPr id="7" name="Slide Number Placeholder 6"/>
-          <p:cNvSpPr>
-            <a:spLocks noGrp="1"/>
-          </p:cNvSpPr>
-          <p:nvPr>
-            <p:ph type="sldNum" sz="quarter" idx="5"/>
-          </p:nvPr>
-        </p:nvSpPr>
-        <p:spPr>
-          <a:xfrm>
-            <a:off x="3884613" y="8685213"/>
-            <a:ext cx="2971800" cy="458787"/>
-          </a:xfrm>
-          <a:prstGeom prst="rect">
-            <a:avLst/>
-          </a:prstGeom>
-        </p:spPr>
-        <p:txBody>
-          <a:bodyPr vert="horz" lIns="91440" tIns="45720" rIns="91440" bIns="45720" rtlCol="0" anchor="b"/>
-          <a:lstStyle>
-            <a:lvl1pPr algn="r">
-              <a:defRPr sz="1200"/>
-            </a:lvl1pPr>
-          </a:lstStyle>
-          <a:p>
-            <a:fld id="{CE5E9CC1-C706-0F49-92D6-E571CC5EEA8F}" type="slidenum">
-              <a:rPr lang="en-US"/>
-              <a:t>‹#›</a:t>
-            </a:fld>
-            <a:endParaRPr lang="en-US"/>
-          </a:p>
-        </p:txBody>
-      </p:sp>
     </p:spTree>
     <p:extLst>
       <p:ext uri="{BB962C8B-B14F-4D97-AF65-F5344CB8AC3E}">
-        <p14:creationId xmlns:p14="http://schemas.microsoft.com/office/powerpoint/2010/main" val="1024086991"/>
+        <p14:creationId xmlns:p14="http://schemas.microsoft.com/office/powerpoint/2010/main" val="971830735"/>
       </p:ext>
     </p:extLst>
   </p:cSld>
@@ -500,10 +281,6 @@
           <a:bodyPr/>
           <a:lstStyle/>
           <a:p>
-            <a:r>
-              <a:rPr lang="en-US" dirty="0"/>
-              <a:t/>
-            </a:r>
             <a:endParaRPr lang="en-US" dirty="0"/>
           </a:p>
         </p:txBody>
@@ -577,6 +354,11 @@
 <file path=ppt/slideMasters/slideMaster1.xml><?xml version="1.0" encoding="utf-8"?>
 <p:sldMaster xmlns:a="http://schemas.openxmlformats.org/drawingml/2006/main" xmlns:r="http://schemas.openxmlformats.org/officeDocument/2006/relationships" xmlns:p="http://schemas.openxmlformats.org/presentationml/2006/main">
   <p:cSld>
+    <p:bg>
+      <p:bgRef idx="1001">
+        <a:schemeClr val="bg1"/>
+      </p:bgRef>
+    </p:bg>
     <p:spTree>
       <p:nvGrpSpPr>
         <p:cNvPr id="1" name=""/>
@@ -859,6 +641,7 @@
         <a:solidFill>
           <a:srgbClr val="FFFFFF"/>
         </a:solidFill>
+        <a:effectLst/>
       </p:bgPr>
     </p:bg>
     <p:spTree>
@@ -899,6 +682,13 @@
             <a:prstDash val="dash"/>
           </a:ln>
         </p:spPr>
+        <p:txBody>
+          <a:bodyPr/>
+          <a:lstStyle/>
+          <a:p>
+            <a:endParaRPr lang="en-US"/>
+          </a:p>
+        </p:txBody>
       </p:sp>
       <p:sp>
         <p:nvSpPr>
@@ -924,58 +714,17 @@
             <a:prstDash val="dash"/>
           </a:ln>
         </p:spPr>
+        <p:txBody>
+          <a:bodyPr/>
+          <a:lstStyle/>
+          <a:p>
+            <a:endParaRPr lang="en-US"/>
+          </a:p>
+        </p:txBody>
       </p:sp>
       <p:pic>
         <p:nvPicPr>
-          <p:cNvPr id="4" name="Image 0" descr="preencoded.png">    </p:cNvPr>
-          <p:cNvPicPr>
-            <a:picLocks noChangeAspect="1"/>
-          </p:cNvPicPr>
-          <p:nvPr/>
-        </p:nvPicPr>
-        <p:blipFill>
-          <a:blip r:embed="rId1"/>
-          <a:stretch>
-            <a:fillRect/>
-          </a:stretch>
-        </p:blipFill>
-        <p:spPr>
-          <a:xfrm>
-            <a:off x="429768" y="2240280"/>
-            <a:ext cx="457200" cy="457200"/>
-          </a:xfrm>
-          <a:prstGeom prst="rect">
-            <a:avLst/>
-          </a:prstGeom>
-        </p:spPr>
-      </p:pic>
-      <p:pic>
-        <p:nvPicPr>
-          <p:cNvPr id="5" name="Image 1" descr="preencoded.png">    </p:cNvPr>
-          <p:cNvPicPr>
-            <a:picLocks noChangeAspect="1"/>
-          </p:cNvPicPr>
-          <p:nvPr/>
-        </p:nvPicPr>
-        <p:blipFill>
-          <a:blip r:embed="rId2"/>
-          <a:stretch>
-            <a:fillRect/>
-          </a:stretch>
-        </p:blipFill>
-        <p:spPr>
-          <a:xfrm>
-            <a:off x="2081776" y="3547872"/>
-            <a:ext cx="317008" cy="475488"/>
-          </a:xfrm>
-          <a:prstGeom prst="rect">
-            <a:avLst/>
-          </a:prstGeom>
-        </p:spPr>
-      </p:pic>
-      <p:pic>
-        <p:nvPicPr>
-          <p:cNvPr id="6" name="Image 2" descr="preencoded.png">    </p:cNvPr>
+          <p:cNvPr id="4" name="Image 0" descr="preencoded.png"/>
           <p:cNvPicPr>
             <a:picLocks noChangeAspect="1"/>
           </p:cNvPicPr>
@@ -989,8 +738,8 @@
         </p:blipFill>
         <p:spPr>
           <a:xfrm>
-            <a:off x="3790884" y="2852928"/>
-            <a:ext cx="556392" cy="530352"/>
+            <a:off x="429768" y="2240280"/>
+            <a:ext cx="457200" cy="457200"/>
           </a:xfrm>
           <a:prstGeom prst="rect">
             <a:avLst/>
@@ -999,7 +748,7 @@
       </p:pic>
       <p:pic>
         <p:nvPicPr>
-          <p:cNvPr id="7" name="Image 3" descr="preencoded.png">    </p:cNvPr>
+          <p:cNvPr id="5" name="Image 1" descr="preencoded.png"/>
           <p:cNvPicPr>
             <a:picLocks noChangeAspect="1"/>
           </p:cNvPicPr>
@@ -1013,8 +762,8 @@
         </p:blipFill>
         <p:spPr>
           <a:xfrm>
-            <a:off x="3639934" y="2560320"/>
-            <a:ext cx="218212" cy="365760"/>
+            <a:off x="2081776" y="3547872"/>
+            <a:ext cx="317008" cy="475488"/>
           </a:xfrm>
           <a:prstGeom prst="rect">
             <a:avLst/>
@@ -1023,7 +772,7 @@
       </p:pic>
       <p:pic>
         <p:nvPicPr>
-          <p:cNvPr id="8" name="Image 4" descr="preencoded.png">    </p:cNvPr>
+          <p:cNvPr id="6" name="Image 2" descr="preencoded.png"/>
           <p:cNvPicPr>
             <a:picLocks noChangeAspect="1"/>
           </p:cNvPicPr>
@@ -1037,7 +786,7 @@
         </p:blipFill>
         <p:spPr>
           <a:xfrm>
-            <a:off x="3013644" y="3584448"/>
+            <a:off x="3790884" y="2852928"/>
             <a:ext cx="556392" cy="530352"/>
           </a:xfrm>
           <a:prstGeom prst="rect">
@@ -1047,7 +796,7 @@
       </p:pic>
       <p:pic>
         <p:nvPicPr>
-          <p:cNvPr id="9" name="Image 5" descr="preencoded.png">    </p:cNvPr>
+          <p:cNvPr id="7" name="Image 3" descr="preencoded.png"/>
           <p:cNvPicPr>
             <a:picLocks noChangeAspect="1"/>
           </p:cNvPicPr>
@@ -1061,7 +810,7 @@
         </p:blipFill>
         <p:spPr>
           <a:xfrm>
-            <a:off x="6840334" y="3383280"/>
+            <a:off x="3639934" y="2560320"/>
             <a:ext cx="218212" cy="365760"/>
           </a:xfrm>
           <a:prstGeom prst="rect">
@@ -1071,21 +820,21 @@
       </p:pic>
       <p:pic>
         <p:nvPicPr>
-          <p:cNvPr id="10" name="Image 6" descr="preencoded.png">    </p:cNvPr>
+          <p:cNvPr id="8" name="Image 4" descr="preencoded.png"/>
           <p:cNvPicPr>
             <a:picLocks noChangeAspect="1"/>
           </p:cNvPicPr>
           <p:nvPr/>
         </p:nvPicPr>
         <p:blipFill>
-          <a:blip r:embed="rId7"/>
+          <a:blip r:embed="rId5"/>
           <a:stretch>
             <a:fillRect/>
           </a:stretch>
         </p:blipFill>
         <p:spPr>
           <a:xfrm>
-            <a:off x="7174164" y="2761488"/>
+            <a:off x="3013644" y="3584448"/>
             <a:ext cx="556392" cy="530352"/>
           </a:xfrm>
           <a:prstGeom prst="rect">
@@ -1095,22 +844,22 @@
       </p:pic>
       <p:pic>
         <p:nvPicPr>
-          <p:cNvPr id="11" name="Image 7" descr="preencoded.png">    </p:cNvPr>
+          <p:cNvPr id="9" name="Image 5" descr="preencoded.png"/>
           <p:cNvPicPr>
             <a:picLocks noChangeAspect="1"/>
           </p:cNvPicPr>
           <p:nvPr/>
         </p:nvPicPr>
         <p:blipFill>
-          <a:blip r:embed="rId8"/>
+          <a:blip r:embed="rId6"/>
           <a:stretch>
             <a:fillRect/>
           </a:stretch>
         </p:blipFill>
         <p:spPr>
           <a:xfrm>
-            <a:off x="9945616" y="2651760"/>
-            <a:ext cx="317008" cy="475488"/>
+            <a:off x="6840334" y="3383280"/>
+            <a:ext cx="218212" cy="365760"/>
           </a:xfrm>
           <a:prstGeom prst="rect">
             <a:avLst/>
@@ -1119,22 +868,22 @@
       </p:pic>
       <p:pic>
         <p:nvPicPr>
-          <p:cNvPr id="12" name="Image 8" descr="preencoded.png">    </p:cNvPr>
+          <p:cNvPr id="10" name="Image 6" descr="preencoded.png"/>
           <p:cNvPicPr>
             <a:picLocks noChangeAspect="1"/>
           </p:cNvPicPr>
           <p:nvPr/>
         </p:nvPicPr>
         <p:blipFill>
-          <a:blip r:embed="rId9"/>
+          <a:blip r:embed="rId5"/>
           <a:stretch>
             <a:fillRect/>
           </a:stretch>
         </p:blipFill>
         <p:spPr>
           <a:xfrm>
-            <a:off x="11247120" y="2560320"/>
-            <a:ext cx="457200" cy="457200"/>
+            <a:off x="7174164" y="2761488"/>
+            <a:ext cx="556392" cy="530352"/>
           </a:xfrm>
           <a:prstGeom prst="rect">
             <a:avLst/>
@@ -1143,21 +892,21 @@
       </p:pic>
       <p:pic>
         <p:nvPicPr>
-          <p:cNvPr id="13" name="Image 9" descr="preencoded.png">    </p:cNvPr>
+          <p:cNvPr id="11" name="Image 7" descr="preencoded.png"/>
           <p:cNvPicPr>
             <a:picLocks noChangeAspect="1"/>
           </p:cNvPicPr>
           <p:nvPr/>
         </p:nvPicPr>
         <p:blipFill>
-          <a:blip r:embed="rId10"/>
+          <a:blip r:embed="rId4"/>
           <a:stretch>
             <a:fillRect/>
           </a:stretch>
         </p:blipFill>
         <p:spPr>
           <a:xfrm>
-            <a:off x="8116816" y="3566160"/>
+            <a:off x="9945616" y="2651760"/>
             <a:ext cx="317008" cy="475488"/>
           </a:xfrm>
           <a:prstGeom prst="rect">
@@ -1167,22 +916,22 @@
       </p:pic>
       <p:pic>
         <p:nvPicPr>
-          <p:cNvPr id="14" name="Image 10" descr="preencoded.png">    </p:cNvPr>
+          <p:cNvPr id="12" name="Image 8" descr="preencoded.png"/>
           <p:cNvPicPr>
             <a:picLocks noChangeAspect="1"/>
           </p:cNvPicPr>
           <p:nvPr/>
         </p:nvPicPr>
         <p:blipFill>
-          <a:blip r:embed="rId11"/>
+          <a:blip r:embed="rId3"/>
           <a:stretch>
             <a:fillRect/>
           </a:stretch>
         </p:blipFill>
         <p:spPr>
           <a:xfrm>
-            <a:off x="10343233" y="1828800"/>
-            <a:ext cx="527613" cy="502920"/>
+            <a:off x="11247120" y="2560320"/>
+            <a:ext cx="457200" cy="457200"/>
           </a:xfrm>
           <a:prstGeom prst="rect">
             <a:avLst/>
@@ -1191,14 +940,62 @@
       </p:pic>
       <p:pic>
         <p:nvPicPr>
-          <p:cNvPr id="15" name="Image 11" descr="preencoded.png">    </p:cNvPr>
+          <p:cNvPr id="13" name="Image 9" descr="preencoded.png"/>
           <p:cNvPicPr>
             <a:picLocks noChangeAspect="1"/>
           </p:cNvPicPr>
           <p:nvPr/>
         </p:nvPicPr>
         <p:blipFill>
-          <a:blip r:embed="rId12"/>
+          <a:blip r:embed="rId4"/>
+          <a:stretch>
+            <a:fillRect/>
+          </a:stretch>
+        </p:blipFill>
+        <p:spPr>
+          <a:xfrm>
+            <a:off x="8116816" y="3566160"/>
+            <a:ext cx="317008" cy="475488"/>
+          </a:xfrm>
+          <a:prstGeom prst="rect">
+            <a:avLst/>
+          </a:prstGeom>
+        </p:spPr>
+      </p:pic>
+      <p:pic>
+        <p:nvPicPr>
+          <p:cNvPr id="14" name="Image 10" descr="preencoded.png"/>
+          <p:cNvPicPr>
+            <a:picLocks noChangeAspect="1"/>
+          </p:cNvPicPr>
+          <p:nvPr/>
+        </p:nvPicPr>
+        <p:blipFill>
+          <a:blip r:embed="rId5"/>
+          <a:stretch>
+            <a:fillRect/>
+          </a:stretch>
+        </p:blipFill>
+        <p:spPr>
+          <a:xfrm>
+            <a:off x="10343233" y="1828800"/>
+            <a:ext cx="527613" cy="502920"/>
+          </a:xfrm>
+          <a:prstGeom prst="rect">
+            <a:avLst/>
+          </a:prstGeom>
+        </p:spPr>
+      </p:pic>
+      <p:pic>
+        <p:nvPicPr>
+          <p:cNvPr id="15" name="Image 11" descr="preencoded.png"/>
+          <p:cNvPicPr>
+            <a:picLocks noChangeAspect="1"/>
+          </p:cNvPicPr>
+          <p:nvPr/>
+        </p:nvPicPr>
+        <p:blipFill>
+          <a:blip r:embed="rId7"/>
           <a:stretch>
             <a:fillRect/>
           </a:stretch>
@@ -1241,6 +1038,13 @@
             <a:prstDash val="solid"/>
           </a:ln>
         </p:spPr>
+        <p:txBody>
+          <a:bodyPr/>
+          <a:lstStyle/>
+          <a:p>
+            <a:endParaRPr lang="en-US"/>
+          </a:p>
+        </p:txBody>
       </p:sp>
       <p:sp>
         <p:nvSpPr>
@@ -1264,6 +1068,13 @@
             <a:prstDash val="solid"/>
           </a:ln>
         </p:spPr>
+        <p:txBody>
+          <a:bodyPr/>
+          <a:lstStyle/>
+          <a:p>
+            <a:endParaRPr lang="en-US"/>
+          </a:p>
+        </p:txBody>
       </p:sp>
       <p:sp>
         <p:nvSpPr>
@@ -1287,6 +1098,13 @@
             <a:prstDash val="solid"/>
           </a:ln>
         </p:spPr>
+        <p:txBody>
+          <a:bodyPr/>
+          <a:lstStyle/>
+          <a:p>
+            <a:endParaRPr lang="en-US"/>
+          </a:p>
+        </p:txBody>
       </p:sp>
       <p:sp>
         <p:nvSpPr>
@@ -1316,6 +1134,13 @@
             <a:prstDash val="solid"/>
           </a:ln>
         </p:spPr>
+        <p:txBody>
+          <a:bodyPr/>
+          <a:lstStyle/>
+          <a:p>
+            <a:endParaRPr lang="en-US"/>
+          </a:p>
+        </p:txBody>
       </p:sp>
       <p:sp>
         <p:nvSpPr>
@@ -1345,6 +1170,13 @@
             <a:prstDash val="solid"/>
           </a:ln>
         </p:spPr>
+        <p:txBody>
+          <a:bodyPr/>
+          <a:lstStyle/>
+          <a:p>
+            <a:endParaRPr lang="en-US"/>
+          </a:p>
+        </p:txBody>
       </p:sp>
       <p:sp>
         <p:nvSpPr>
@@ -1374,6 +1206,13 @@
             <a:prstDash val="solid"/>
           </a:ln>
         </p:spPr>
+        <p:txBody>
+          <a:bodyPr/>
+          <a:lstStyle/>
+          <a:p>
+            <a:endParaRPr lang="en-US"/>
+          </a:p>
+        </p:txBody>
       </p:sp>
       <p:sp>
         <p:nvSpPr>
@@ -1403,6 +1242,13 @@
             <a:prstDash val="solid"/>
           </a:ln>
         </p:spPr>
+        <p:txBody>
+          <a:bodyPr/>
+          <a:lstStyle/>
+          <a:p>
+            <a:endParaRPr lang="en-US"/>
+          </a:p>
+        </p:txBody>
       </p:sp>
       <p:sp>
         <p:nvSpPr>
@@ -1426,6 +1272,13 @@
             <a:prstDash val="solid"/>
           </a:ln>
         </p:spPr>
+        <p:txBody>
+          <a:bodyPr/>
+          <a:lstStyle/>
+          <a:p>
+            <a:endParaRPr lang="en-US"/>
+          </a:p>
+        </p:txBody>
       </p:sp>
       <p:sp>
         <p:nvSpPr>
@@ -1449,6 +1302,13 @@
             <a:prstDash val="solid"/>
           </a:ln>
         </p:spPr>
+        <p:txBody>
+          <a:bodyPr/>
+          <a:lstStyle/>
+          <a:p>
+            <a:endParaRPr lang="en-US"/>
+          </a:p>
+        </p:txBody>
       </p:sp>
       <p:sp>
         <p:nvSpPr>
@@ -1478,17 +1338,24 @@
             <a:prstDash val="solid"/>
           </a:ln>
         </p:spPr>
+        <p:txBody>
+          <a:bodyPr/>
+          <a:lstStyle/>
+          <a:p>
+            <a:endParaRPr lang="en-US"/>
+          </a:p>
+        </p:txBody>
       </p:sp>
       <p:pic>
         <p:nvPicPr>
-          <p:cNvPr id="26" name="Image 12" descr="preencoded.png">    </p:cNvPr>
+          <p:cNvPr id="26" name="Image 12" descr="preencoded.png"/>
           <p:cNvPicPr>
             <a:picLocks noChangeAspect="1"/>
           </p:cNvPicPr>
           <p:nvPr/>
         </p:nvPicPr>
         <p:blipFill>
-          <a:blip r:embed="rId13"/>
+          <a:blip r:embed="rId8"/>
           <a:stretch>
             <a:fillRect/>
           </a:stretch>
@@ -1505,14 +1372,14 @@
       </p:pic>
       <p:pic>
         <p:nvPicPr>
-          <p:cNvPr id="27" name="Image 13" descr="preencoded.png">    </p:cNvPr>
+          <p:cNvPr id="27" name="Image 13" descr="preencoded.png"/>
           <p:cNvPicPr>
             <a:picLocks noChangeAspect="1"/>
           </p:cNvPicPr>
           <p:nvPr/>
         </p:nvPicPr>
         <p:blipFill>
-          <a:blip r:embed="rId14"/>
+          <a:blip r:embed="rId8"/>
           <a:stretch>
             <a:fillRect/>
           </a:stretch>
@@ -1529,14 +1396,14 @@
       </p:pic>
       <p:pic>
         <p:nvPicPr>
-          <p:cNvPr id="28" name="Image 14" descr="preencoded.png">    </p:cNvPr>
+          <p:cNvPr id="28" name="Image 14" descr="preencoded.png"/>
           <p:cNvPicPr>
             <a:picLocks noChangeAspect="1"/>
           </p:cNvPicPr>
           <p:nvPr/>
         </p:nvPicPr>
         <p:blipFill>
-          <a:blip r:embed="rId15"/>
+          <a:blip r:embed="rId9"/>
           <a:stretch>
             <a:fillRect/>
           </a:stretch>
@@ -1570,17 +1437,24 @@
           </a:solidFill>
           <a:ln/>
         </p:spPr>
+        <p:txBody>
+          <a:bodyPr/>
+          <a:lstStyle/>
+          <a:p>
+            <a:endParaRPr lang="en-US"/>
+          </a:p>
+        </p:txBody>
       </p:sp>
       <p:pic>
         <p:nvPicPr>
-          <p:cNvPr id="30" name="Image 15" descr="preencoded.png">    </p:cNvPr>
+          <p:cNvPr id="30" name="Image 15" descr="preencoded.png"/>
           <p:cNvPicPr>
             <a:picLocks noChangeAspect="1"/>
           </p:cNvPicPr>
           <p:nvPr/>
         </p:nvPicPr>
         <p:blipFill>
-          <a:blip r:embed="rId16"/>
+          <a:blip r:embed="rId9"/>
           <a:stretch>
             <a:fillRect/>
           </a:stretch>
@@ -1597,14 +1471,14 @@
       </p:pic>
       <p:pic>
         <p:nvPicPr>
-          <p:cNvPr id="31" name="Image 16" descr="preencoded.png">    </p:cNvPr>
+          <p:cNvPr id="31" name="Image 16" descr="preencoded.png"/>
           <p:cNvPicPr>
             <a:picLocks noChangeAspect="1"/>
           </p:cNvPicPr>
           <p:nvPr/>
         </p:nvPicPr>
         <p:blipFill>
-          <a:blip r:embed="rId17"/>
+          <a:blip r:embed="rId7"/>
           <a:stretch>
             <a:fillRect/>
           </a:stretch>
@@ -1621,14 +1495,14 @@
       </p:pic>
       <p:pic>
         <p:nvPicPr>
-          <p:cNvPr id="32" name="Image 17" descr="preencoded.png">    </p:cNvPr>
+          <p:cNvPr id="32" name="Image 17" descr="preencoded.png"/>
           <p:cNvPicPr>
             <a:picLocks noChangeAspect="1"/>
           </p:cNvPicPr>
           <p:nvPr/>
         </p:nvPicPr>
         <p:blipFill>
-          <a:blip r:embed="rId18"/>
+          <a:blip r:embed="rId5"/>
           <a:stretch>
             <a:fillRect/>
           </a:stretch>
@@ -1645,14 +1519,14 @@
       </p:pic>
       <p:pic>
         <p:nvPicPr>
-          <p:cNvPr id="33" name="Image 18" descr="preencoded.png">    </p:cNvPr>
+          <p:cNvPr id="33" name="Image 18" descr="preencoded.png"/>
           <p:cNvPicPr>
             <a:picLocks noChangeAspect="1"/>
           </p:cNvPicPr>
           <p:nvPr/>
         </p:nvPicPr>
         <p:blipFill>
-          <a:blip r:embed="rId19"/>
+          <a:blip r:embed="rId7"/>
           <a:stretch>
             <a:fillRect/>
           </a:stretch>
@@ -1669,14 +1543,14 @@
       </p:pic>
       <p:pic>
         <p:nvPicPr>
-          <p:cNvPr id="34" name="Image 19" descr="preencoded.png">    </p:cNvPr>
+          <p:cNvPr id="34" name="Image 19" descr="preencoded.png"/>
           <p:cNvPicPr>
             <a:picLocks noChangeAspect="1"/>
           </p:cNvPicPr>
           <p:nvPr/>
         </p:nvPicPr>
         <p:blipFill>
-          <a:blip r:embed="rId20"/>
+          <a:blip r:embed="rId10"/>
           <a:stretch>
             <a:fillRect/>
           </a:stretch>
@@ -1712,7 +1586,7 @@
           <a:bodyPr wrap="square" lIns="0" tIns="0" rIns="0" bIns="0" rtlCol="0" anchor="ctr"/>
           <a:lstStyle/>
           <a:p>
-            <a:pPr algn="ctr" indent="0" marL="0">
+            <a:pPr marL="0" indent="0" algn="ctr">
               <a:buNone/>
             </a:pPr>
             <a:r>
@@ -1751,7 +1625,7 @@
           <a:bodyPr wrap="square" lIns="0" tIns="0" rIns="0" bIns="0" rtlCol="0" anchor="ctr"/>
           <a:lstStyle/>
           <a:p>
-            <a:pPr algn="ctr" indent="0" marL="0">
+            <a:pPr marL="0" indent="0" algn="ctr">
               <a:buNone/>
             </a:pPr>
             <a:r>
@@ -1790,7 +1664,7 @@
           <a:bodyPr wrap="square" lIns="0" tIns="0" rIns="0" bIns="0" rtlCol="0" anchor="ctr"/>
           <a:lstStyle/>
           <a:p>
-            <a:pPr algn="ctr" indent="0" marL="0">
+            <a:pPr marL="0" indent="0" algn="ctr">
               <a:buNone/>
             </a:pPr>
             <a:r>
@@ -1829,7 +1703,7 @@
           <a:bodyPr wrap="square" lIns="0" tIns="0" rIns="0" bIns="0" rtlCol="0" anchor="ctr"/>
           <a:lstStyle/>
           <a:p>
-            <a:pPr algn="ctr" indent="0" marL="0">
+            <a:pPr marL="0" indent="0" algn="ctr">
               <a:buNone/>
             </a:pPr>
             <a:r>
@@ -1855,8 +1729,8 @@
         </p:nvSpPr>
         <p:spPr>
           <a:xfrm>
-            <a:off x="256032" y="1920240"/>
-            <a:ext cx="1325880" cy="384048"/>
+            <a:off x="895667" y="2108959"/>
+            <a:ext cx="710361" cy="566928"/>
           </a:xfrm>
           <a:prstGeom prst="rect">
             <a:avLst/>
@@ -1868,7 +1742,7 @@
           <a:bodyPr wrap="square" lIns="0" tIns="0" rIns="0" bIns="0" rtlCol="0" anchor="ctr"/>
           <a:lstStyle/>
           <a:p>
-            <a:pPr algn="ctr" indent="0" marL="0">
+            <a:pPr marL="0" indent="0" algn="ctr">
               <a:buNone/>
             </a:pPr>
             <a:r>
@@ -1907,7 +1781,7 @@
           <a:bodyPr wrap="square" lIns="0" tIns="0" rIns="0" bIns="0" rtlCol="0" anchor="ctr"/>
           <a:lstStyle/>
           <a:p>
-            <a:pPr algn="ctr" indent="0" marL="0">
+            <a:pPr marL="0" indent="0" algn="ctr">
               <a:buNone/>
             </a:pPr>
             <a:r>
@@ -1933,8 +1807,8 @@
         </p:nvSpPr>
         <p:spPr>
           <a:xfrm>
-            <a:off x="2697480" y="1005840"/>
-            <a:ext cx="2377440" cy="219456"/>
+            <a:off x="3657473" y="1190061"/>
+            <a:ext cx="1307592" cy="67045"/>
           </a:xfrm>
           <a:prstGeom prst="rect">
             <a:avLst/>
@@ -1946,7 +1820,7 @@
           <a:bodyPr wrap="square" lIns="0" tIns="0" rIns="0" bIns="0" rtlCol="0" anchor="ctr"/>
           <a:lstStyle/>
           <a:p>
-            <a:pPr algn="ctr" indent="0" marL="0">
+            <a:pPr marL="0" indent="0" algn="ctr">
               <a:buNone/>
             </a:pPr>
             <a:r>
@@ -1972,8 +1846,8 @@
         </p:nvSpPr>
         <p:spPr>
           <a:xfrm>
-            <a:off x="7223760" y="1042416"/>
-            <a:ext cx="1600200" cy="219456"/>
+            <a:off x="7054902" y="1026023"/>
+            <a:ext cx="1048786" cy="416834"/>
           </a:xfrm>
           <a:prstGeom prst="rect">
             <a:avLst/>
@@ -1985,7 +1859,7 @@
           <a:bodyPr wrap="square" lIns="0" tIns="0" rIns="0" bIns="0" rtlCol="0" anchor="ctr"/>
           <a:lstStyle/>
           <a:p>
-            <a:pPr algn="ctr" indent="0" marL="0">
+            <a:pPr marL="0" indent="0" algn="ctr">
               <a:buNone/>
             </a:pPr>
             <a:r>
@@ -2024,7 +1898,7 @@
           <a:bodyPr wrap="square" lIns="0" tIns="0" rIns="0" bIns="0" rtlCol="0" anchor="ctr"/>
           <a:lstStyle/>
           <a:p>
-            <a:pPr algn="ctr" indent="0" marL="0">
+            <a:pPr marL="0" indent="0" algn="ctr">
               <a:buNone/>
             </a:pPr>
             <a:r>
@@ -2042,246 +1916,16 @@
           </a:p>
         </p:txBody>
       </p:sp>
-      <p:sp>
-        <p:nvSpPr>
-          <p:cNvPr id="44" name="Text 22"/>
-          <p:cNvSpPr/>
-          <p:nvPr/>
-        </p:nvSpPr>
-        <p:spPr>
-          <a:xfrm>
-            <a:off x="274320" y="237744"/>
-            <a:ext cx="2011680" cy="201168"/>
-          </a:xfrm>
-          <a:prstGeom prst="rect">
-            <a:avLst/>
-          </a:prstGeom>
-          <a:noFill/>
-          <a:ln/>
-        </p:spPr>
-        <p:txBody>
-          <a:bodyPr wrap="square" lIns="0" tIns="0" rIns="0" bIns="0" rtlCol="0" anchor="ctr"/>
-          <a:lstStyle/>
-          <a:p>
-            <a:pPr algn="ctr" indent="0" marL="0">
-              <a:buNone/>
-            </a:pPr>
-            <a:r>
-              <a:rPr lang="en-US" sz="1100" b="1" dirty="0">
-                <a:solidFill>
-                  <a:srgbClr val="1A1A1A"/>
-                </a:solidFill>
-                <a:latin typeface="Times New Roman" pitchFamily="34" charset="0"/>
-                <a:ea typeface="Times New Roman" pitchFamily="34" charset="-122"/>
-                <a:cs typeface="Times New Roman" pitchFamily="34" charset="-120"/>
-              </a:rPr>
-              <a:t>Orthogonal OFDMA sub-bands</a:t>
-            </a:r>
-            <a:endParaRPr lang="en-US" sz="1100" dirty="0"/>
-          </a:p>
-        </p:txBody>
-      </p:sp>
-      <p:sp>
-        <p:nvSpPr>
-          <p:cNvPr id="45" name="Shape 23"/>
-          <p:cNvSpPr/>
-          <p:nvPr/>
-        </p:nvSpPr>
-        <p:spPr>
-          <a:xfrm>
-            <a:off x="365760" y="493776"/>
-            <a:ext cx="841248" cy="192024"/>
-          </a:xfrm>
-          <a:prstGeom prst="rect">
-            <a:avLst/>
-          </a:prstGeom>
-          <a:solidFill>
-            <a:srgbClr val="3A4750"/>
-          </a:solidFill>
-          <a:ln w="6350">
-            <a:solidFill>
-              <a:srgbClr val="1A1A1A"/>
-            </a:solidFill>
-            <a:prstDash val="solid"/>
-          </a:ln>
-        </p:spPr>
-      </p:sp>
-      <p:sp>
-        <p:nvSpPr>
-          <p:cNvPr id="46" name="Shape 24"/>
-          <p:cNvSpPr/>
-          <p:nvPr/>
-        </p:nvSpPr>
-        <p:spPr>
-          <a:xfrm>
-            <a:off x="1261872" y="493776"/>
-            <a:ext cx="932688" cy="192024"/>
-          </a:xfrm>
-          <a:prstGeom prst="rect">
-            <a:avLst/>
-          </a:prstGeom>
-          <a:solidFill>
-            <a:srgbClr val="0073BA"/>
-          </a:solidFill>
-          <a:ln w="6350">
-            <a:solidFill>
-              <a:srgbClr val="1A1A1A"/>
-            </a:solidFill>
-            <a:prstDash val="solid"/>
-          </a:ln>
-        </p:spPr>
-      </p:sp>
-      <p:sp>
-        <p:nvSpPr>
-          <p:cNvPr id="47" name="Text 25"/>
-          <p:cNvSpPr/>
-          <p:nvPr/>
-        </p:nvSpPr>
-        <p:spPr>
-          <a:xfrm>
-            <a:off x="256032" y="704088"/>
-            <a:ext cx="1060704" cy="182880"/>
-          </a:xfrm>
-          <a:prstGeom prst="rect">
-            <a:avLst/>
-          </a:prstGeom>
-          <a:noFill/>
-          <a:ln/>
-        </p:spPr>
-        <p:txBody>
-          <a:bodyPr wrap="square" lIns="0" tIns="0" rIns="0" bIns="0" rtlCol="0" anchor="ctr"/>
-          <a:lstStyle/>
-          <a:p>
-            <a:pPr algn="ctr" indent="0" marL="0">
-              <a:buNone/>
-            </a:pPr>
-            <a:r>
-              <a:rPr lang="en-US" sz="950" dirty="0">
-                <a:solidFill>
-                  <a:srgbClr val="1A1A1A"/>
-                </a:solidFill>
-                <a:latin typeface="Times New Roman" pitchFamily="34" charset="0"/>
-                <a:ea typeface="Times New Roman" pitchFamily="34" charset="-122"/>
-                <a:cs typeface="Times New Roman" pitchFamily="34" charset="-120"/>
-              </a:rPr>
-              <a:t>cellular UEs</a:t>
-            </a:r>
-            <a:endParaRPr lang="en-US" sz="950" dirty="0"/>
-          </a:p>
-        </p:txBody>
-      </p:sp>
-      <p:sp>
-        <p:nvSpPr>
-          <p:cNvPr id="48" name="Text 26"/>
-          <p:cNvSpPr/>
-          <p:nvPr/>
-        </p:nvSpPr>
-        <p:spPr>
-          <a:xfrm>
-            <a:off x="1216152" y="704088"/>
-            <a:ext cx="1024128" cy="182880"/>
-          </a:xfrm>
-          <a:prstGeom prst="rect">
-            <a:avLst/>
-          </a:prstGeom>
-          <a:noFill/>
-          <a:ln/>
-        </p:spPr>
-        <p:txBody>
-          <a:bodyPr wrap="square" lIns="0" tIns="0" rIns="0" bIns="0" rtlCol="0" anchor="ctr"/>
-          <a:lstStyle/>
-          <a:p>
-            <a:pPr algn="ctr" indent="0" marL="0">
-              <a:buNone/>
-            </a:pPr>
-            <a:r>
-              <a:rPr lang="en-US" sz="950" dirty="0">
-                <a:solidFill>
-                  <a:srgbClr val="1A1A1A"/>
-                </a:solidFill>
-                <a:latin typeface="Times New Roman" pitchFamily="34" charset="0"/>
-                <a:ea typeface="Times New Roman" pitchFamily="34" charset="-122"/>
-                <a:cs typeface="Times New Roman" pitchFamily="34" charset="-120"/>
-              </a:rPr>
-              <a:t>FWA CPEs</a:t>
-            </a:r>
-            <a:endParaRPr lang="en-US" sz="950" dirty="0"/>
-          </a:p>
-        </p:txBody>
-      </p:sp>
-      <p:sp>
-        <p:nvSpPr>
-          <p:cNvPr id="49" name="Shape 27"/>
-          <p:cNvSpPr/>
-          <p:nvPr/>
-        </p:nvSpPr>
-        <p:spPr>
-          <a:xfrm>
-            <a:off x="365760" y="960120"/>
-            <a:ext cx="1828800" cy="0"/>
-          </a:xfrm>
-          <a:prstGeom prst="line">
-            <a:avLst/>
-          </a:prstGeom>
-          <a:noFill/>
-          <a:ln w="9525">
-            <a:solidFill>
-              <a:srgbClr val="1A1A1A"/>
-            </a:solidFill>
-            <a:prstDash val="solid"/>
-            <a:tailEnd type="triangle"/>
-          </a:ln>
-        </p:spPr>
-      </p:sp>
-      <p:sp>
-        <p:nvSpPr>
-          <p:cNvPr id="50" name="Text 28"/>
-          <p:cNvSpPr/>
-          <p:nvPr/>
-        </p:nvSpPr>
-        <p:spPr>
-          <a:xfrm>
-            <a:off x="365760" y="978408"/>
-            <a:ext cx="1828800" cy="182880"/>
-          </a:xfrm>
-          <a:prstGeom prst="rect">
-            <a:avLst/>
-          </a:prstGeom>
-          <a:noFill/>
-          <a:ln/>
-        </p:spPr>
-        <p:txBody>
-          <a:bodyPr wrap="square" lIns="0" tIns="0" rIns="0" bIns="0" rtlCol="0" anchor="ctr"/>
-          <a:lstStyle/>
-          <a:p>
-            <a:pPr algn="ctr" indent="0" marL="0">
-              <a:buNone/>
-            </a:pPr>
-            <a:r>
-              <a:rPr lang="en-US" sz="950" i="1" dirty="0">
-                <a:solidFill>
-                  <a:srgbClr val="1A1A1A"/>
-                </a:solidFill>
-                <a:latin typeface="Times New Roman" pitchFamily="34" charset="0"/>
-                <a:ea typeface="Times New Roman" pitchFamily="34" charset="-122"/>
-                <a:cs typeface="Times New Roman" pitchFamily="34" charset="-120"/>
-              </a:rPr>
-              <a:t>frequency</a:t>
-            </a:r>
-            <a:endParaRPr lang="en-US" sz="950" dirty="0"/>
-          </a:p>
-        </p:txBody>
-      </p:sp>
       <p:pic>
         <p:nvPicPr>
-          <p:cNvPr id="51" name="Image 20" descr="preencoded.png">    </p:cNvPr>
+          <p:cNvPr id="51" name="Image 20" descr="preencoded.png"/>
           <p:cNvPicPr>
             <a:picLocks noChangeAspect="1"/>
           </p:cNvPicPr>
           <p:nvPr/>
         </p:nvPicPr>
         <p:blipFill>
-          <a:blip r:embed="rId21"/>
+          <a:blip r:embed="rId8"/>
           <a:stretch>
             <a:fillRect/>
           </a:stretch>
@@ -2317,7 +1961,7 @@
           <a:bodyPr wrap="square" lIns="0" tIns="0" rIns="0" bIns="0" rtlCol="0" anchor="ctr"/>
           <a:lstStyle/>
           <a:p>
-            <a:pPr indent="0" marL="0">
+            <a:pPr marL="0" indent="0">
               <a:buNone/>
             </a:pPr>
             <a:r>
@@ -2337,14 +1981,14 @@
       </p:sp>
       <p:pic>
         <p:nvPicPr>
-          <p:cNvPr id="53" name="Image 21" descr="preencoded.png">    </p:cNvPr>
+          <p:cNvPr id="53" name="Image 21" descr="preencoded.png"/>
           <p:cNvPicPr>
             <a:picLocks noChangeAspect="1"/>
           </p:cNvPicPr>
           <p:nvPr/>
         </p:nvPicPr>
         <p:blipFill>
-          <a:blip r:embed="rId22"/>
+          <a:blip r:embed="rId5"/>
           <a:stretch>
             <a:fillRect/>
           </a:stretch>
@@ -2380,7 +2024,7 @@
           <a:bodyPr wrap="square" lIns="0" tIns="0" rIns="0" bIns="0" rtlCol="0" anchor="ctr"/>
           <a:lstStyle/>
           <a:p>
-            <a:pPr indent="0" marL="0">
+            <a:pPr marL="0" indent="0">
               <a:buNone/>
             </a:pPr>
             <a:r>
@@ -2400,14 +2044,14 @@
       </p:sp>
       <p:pic>
         <p:nvPicPr>
-          <p:cNvPr id="55" name="Image 22" descr="preencoded.png">    </p:cNvPr>
+          <p:cNvPr id="55" name="Image 22" descr="preencoded.png"/>
           <p:cNvPicPr>
             <a:picLocks noChangeAspect="1"/>
           </p:cNvPicPr>
           <p:nvPr/>
         </p:nvPicPr>
         <p:blipFill>
-          <a:blip r:embed="rId23"/>
+          <a:blip r:embed="rId4"/>
           <a:stretch>
             <a:fillRect/>
           </a:stretch>
@@ -2443,7 +2087,7 @@
           <a:bodyPr wrap="square" lIns="0" tIns="0" rIns="0" bIns="0" rtlCol="0" anchor="ctr"/>
           <a:lstStyle/>
           <a:p>
-            <a:pPr indent="0" marL="0">
+            <a:pPr marL="0" indent="0">
               <a:buNone/>
             </a:pPr>
             <a:r>
@@ -2463,14 +2107,14 @@
       </p:sp>
       <p:pic>
         <p:nvPicPr>
-          <p:cNvPr id="57" name="Image 23" descr="preencoded.png">    </p:cNvPr>
+          <p:cNvPr id="57" name="Image 23" descr="preencoded.png"/>
           <p:cNvPicPr>
             <a:picLocks noChangeAspect="1"/>
           </p:cNvPicPr>
           <p:nvPr/>
         </p:nvPicPr>
         <p:blipFill>
-          <a:blip r:embed="rId24"/>
+          <a:blip r:embed="rId9"/>
           <a:stretch>
             <a:fillRect/>
           </a:stretch>
@@ -2506,7 +2150,7 @@
           <a:bodyPr wrap="square" lIns="0" tIns="0" rIns="0" bIns="0" rtlCol="0" anchor="ctr"/>
           <a:lstStyle/>
           <a:p>
-            <a:pPr indent="0" marL="0">
+            <a:pPr marL="0" indent="0">
               <a:buNone/>
             </a:pPr>
             <a:r>
@@ -2526,14 +2170,14 @@
       </p:sp>
       <p:pic>
         <p:nvPicPr>
-          <p:cNvPr id="59" name="Image 24" descr="preencoded.png">    </p:cNvPr>
+          <p:cNvPr id="59" name="Image 24" descr="preencoded.png"/>
           <p:cNvPicPr>
             <a:picLocks noChangeAspect="1"/>
           </p:cNvPicPr>
           <p:nvPr/>
         </p:nvPicPr>
         <p:blipFill>
-          <a:blip r:embed="rId25"/>
+          <a:blip r:embed="rId7"/>
           <a:stretch>
             <a:fillRect/>
           </a:stretch>
@@ -2569,7 +2213,7 @@
           <a:bodyPr wrap="square" lIns="0" tIns="0" rIns="0" bIns="0" rtlCol="0" anchor="ctr"/>
           <a:lstStyle/>
           <a:p>
-            <a:pPr indent="0" marL="0">
+            <a:pPr marL="0" indent="0">
               <a:buNone/>
             </a:pPr>
             <a:r>
@@ -2589,14 +2233,14 @@
       </p:sp>
       <p:pic>
         <p:nvPicPr>
-          <p:cNvPr id="61" name="Image 25" descr="preencoded.png">    </p:cNvPr>
+          <p:cNvPr id="61" name="Image 25" descr="preencoded.png"/>
           <p:cNvPicPr>
             <a:picLocks noChangeAspect="1"/>
           </p:cNvPicPr>
           <p:nvPr/>
         </p:nvPicPr>
         <p:blipFill>
-          <a:blip r:embed="rId26"/>
+          <a:blip r:embed="rId6"/>
           <a:stretch>
             <a:fillRect/>
           </a:stretch>
@@ -2632,7 +2276,7 @@
           <a:bodyPr wrap="square" lIns="0" tIns="0" rIns="0" bIns="0" rtlCol="0" anchor="ctr"/>
           <a:lstStyle/>
           <a:p>
-            <a:pPr indent="0" marL="0">
+            <a:pPr marL="0" indent="0">
               <a:buNone/>
             </a:pPr>
             <a:r>
@@ -2652,14 +2296,14 @@
       </p:sp>
       <p:pic>
         <p:nvPicPr>
-          <p:cNvPr id="63" name="Image 26" descr="preencoded.png">    </p:cNvPr>
+          <p:cNvPr id="63" name="Image 26" descr="preencoded.png"/>
           <p:cNvPicPr>
             <a:picLocks noChangeAspect="1"/>
           </p:cNvPicPr>
           <p:nvPr/>
         </p:nvPicPr>
         <p:blipFill>
-          <a:blip r:embed="rId27"/>
+          <a:blip r:embed="rId10"/>
           <a:stretch>
             <a:fillRect/>
           </a:stretch>
@@ -2695,7 +2339,7 @@
           <a:bodyPr wrap="square" lIns="0" tIns="0" rIns="0" bIns="0" rtlCol="0" anchor="ctr"/>
           <a:lstStyle/>
           <a:p>
-            <a:pPr indent="0" marL="0">
+            <a:pPr marL="0" indent="0">
               <a:buNone/>
             </a:pPr>
             <a:r>
@@ -2710,6 +2354,93 @@
               <a:t>In-car UE</a:t>
             </a:r>
             <a:endParaRPr lang="en-US" sz="1050" dirty="0"/>
+          </a:p>
+        </p:txBody>
+      </p:sp>
+      <p:sp>
+        <p:nvSpPr>
+          <p:cNvPr id="66" name="Shape 7">
+            <a:extLst>
+              <a:ext uri="{FF2B5EF4-FFF2-40B4-BE49-F238E27FC236}">
+                <a16:creationId xmlns:a16="http://schemas.microsoft.com/office/drawing/2014/main" id="{608F1F48-174A-CDFC-0C6F-9C0DDD81F6A7}"/>
+              </a:ext>
+            </a:extLst>
+          </p:cNvPr>
+          <p:cNvSpPr/>
+          <p:nvPr/>
+        </p:nvSpPr>
+        <p:spPr>
+          <a:xfrm rot="6717892" flipV="1">
+            <a:off x="9709652" y="1147135"/>
+            <a:ext cx="310896" cy="973290"/>
+          </a:xfrm>
+          <a:prstGeom prst="triangle">
+            <a:avLst/>
+          </a:prstGeom>
+          <a:solidFill>
+            <a:srgbClr val="0073BA">
+              <a:alpha val="45000"/>
+            </a:srgbClr>
+          </a:solidFill>
+          <a:ln w="9525">
+            <a:solidFill>
+              <a:srgbClr val="0073BA">
+                <a:alpha val="75000"/>
+              </a:srgbClr>
+            </a:solidFill>
+            <a:prstDash val="solid"/>
+          </a:ln>
+        </p:spPr>
+        <p:txBody>
+          <a:bodyPr/>
+          <a:lstStyle/>
+          <a:p>
+            <a:endParaRPr lang="en-US" dirty="0"/>
+          </a:p>
+        </p:txBody>
+      </p:sp>
+      <p:sp>
+        <p:nvSpPr>
+          <p:cNvPr id="44" name="Text 21">
+            <a:extLst>
+              <a:ext uri="{FF2B5EF4-FFF2-40B4-BE49-F238E27FC236}">
+                <a16:creationId xmlns:a16="http://schemas.microsoft.com/office/drawing/2014/main" id="{7B2C6516-8347-7C74-BFB2-FF2E14E8ECE9}"/>
+              </a:ext>
+            </a:extLst>
+          </p:cNvPr>
+          <p:cNvSpPr/>
+          <p:nvPr/>
+        </p:nvSpPr>
+        <p:spPr>
+          <a:xfrm>
+            <a:off x="10104120" y="2409830"/>
+            <a:ext cx="1097280" cy="201168"/>
+          </a:xfrm>
+          <a:prstGeom prst="rect">
+            <a:avLst/>
+          </a:prstGeom>
+          <a:noFill/>
+          <a:ln/>
+        </p:spPr>
+        <p:txBody>
+          <a:bodyPr wrap="square" lIns="0" tIns="0" rIns="0" bIns="0" rtlCol="0" anchor="ctr"/>
+          <a:lstStyle/>
+          <a:p>
+            <a:pPr marL="0" indent="0" algn="ctr">
+              <a:buNone/>
+            </a:pPr>
+            <a:r>
+              <a:rPr lang="en-US" sz="1200" b="1" dirty="0">
+                <a:solidFill>
+                  <a:srgbClr val="1A1A1A"/>
+                </a:solidFill>
+                <a:latin typeface="Times New Roman" pitchFamily="34" charset="0"/>
+                <a:ea typeface="Times New Roman" pitchFamily="34" charset="-122"/>
+                <a:cs typeface="Times New Roman" pitchFamily="34" charset="-120"/>
+              </a:rPr>
+              <a:t>FWA CPE</a:t>
+            </a:r>
+            <a:endParaRPr lang="en-US" sz="1200" dirty="0"/>
           </a:p>
         </p:txBody>
       </p:sp>
@@ -3014,4 +2745,319 @@
     </a:ext>
   </a:extLst>
 </a:theme>
+</file>
+
+<file path=ppt/theme/theme2.xml><?xml version="1.0" encoding="utf-8"?>
+<a:theme xmlns:a="http://schemas.openxmlformats.org/drawingml/2006/main" name="Office Theme">
+  <a:themeElements>
+    <a:clrScheme name="Office">
+      <a:dk1>
+        <a:sysClr val="windowText" lastClr="000000"/>
+      </a:dk1>
+      <a:lt1>
+        <a:sysClr val="window" lastClr="FFFFFF"/>
+      </a:lt1>
+      <a:dk2>
+        <a:srgbClr val="0E2841"/>
+      </a:dk2>
+      <a:lt2>
+        <a:srgbClr val="E8E8E8"/>
+      </a:lt2>
+      <a:accent1>
+        <a:srgbClr val="156082"/>
+      </a:accent1>
+      <a:accent2>
+        <a:srgbClr val="E97132"/>
+      </a:accent2>
+      <a:accent3>
+        <a:srgbClr val="196B24"/>
+      </a:accent3>
+      <a:accent4>
+        <a:srgbClr val="0F9ED5"/>
+      </a:accent4>
+      <a:accent5>
+        <a:srgbClr val="A02B93"/>
+      </a:accent5>
+      <a:accent6>
+        <a:srgbClr val="4EA72E"/>
+      </a:accent6>
+      <a:hlink>
+        <a:srgbClr val="467886"/>
+      </a:hlink>
+      <a:folHlink>
+        <a:srgbClr val="96607D"/>
+      </a:folHlink>
+    </a:clrScheme>
+    <a:fontScheme name="Office">
+      <a:majorFont>
+        <a:latin typeface="Aptos Display" panose="02110004020202020204"/>
+        <a:ea typeface=""/>
+        <a:cs typeface=""/>
+        <a:font script="Jpan" typeface="游ゴシック Light"/>
+        <a:font script="Hang" typeface="맑은 고딕"/>
+        <a:font script="Hans" typeface="等线 Light"/>
+        <a:font script="Hant" typeface="新細明體"/>
+        <a:font script="Arab" typeface="Times New Roman"/>
+        <a:font script="Hebr" typeface="Times New Roman"/>
+        <a:font script="Thai" typeface="Angsana New"/>
+        <a:font script="Ethi" typeface="Nyala"/>
+        <a:font script="Beng" typeface="Vrinda"/>
+        <a:font script="Gujr" typeface="Shruti"/>
+        <a:font script="Khmr" typeface="MoolBoran"/>
+        <a:font script="Knda" typeface="Tunga"/>
+        <a:font script="Guru" typeface="Raavi"/>
+        <a:font script="Cans" typeface="Euphemia"/>
+        <a:font script="Cher" typeface="Plantagenet Cherokee"/>
+        <a:font script="Yiii" typeface="Microsoft Yi Baiti"/>
+        <a:font script="Tibt" typeface="Microsoft Himalaya"/>
+        <a:font script="Thaa" typeface="MV Boli"/>
+        <a:font script="Deva" typeface="Mangal"/>
+        <a:font script="Telu" typeface="Gautami"/>
+        <a:font script="Taml" typeface="Latha"/>
+        <a:font script="Syrc" typeface="Estrangelo Edessa"/>
+        <a:font script="Orya" typeface="Kalinga"/>
+        <a:font script="Mlym" typeface="Kartika"/>
+        <a:font script="Laoo" typeface="DokChampa"/>
+        <a:font script="Sinh" typeface="Iskoola Pota"/>
+        <a:font script="Mong" typeface="Mongolian Baiti"/>
+        <a:font script="Viet" typeface="Times New Roman"/>
+        <a:font script="Uigh" typeface="Microsoft Uighur"/>
+        <a:font script="Geor" typeface="Sylfaen"/>
+        <a:font script="Armn" typeface="Arial"/>
+        <a:font script="Bugi" typeface="Leelawadee UI"/>
+        <a:font script="Bopo" typeface="Microsoft JhengHei"/>
+        <a:font script="Java" typeface="Javanese Text"/>
+        <a:font script="Lisu" typeface="Segoe UI"/>
+        <a:font script="Mymr" typeface="Myanmar Text"/>
+        <a:font script="Nkoo" typeface="Ebrima"/>
+        <a:font script="Olck" typeface="Nirmala UI"/>
+        <a:font script="Osma" typeface="Ebrima"/>
+        <a:font script="Phag" typeface="Phagspa"/>
+        <a:font script="Syrn" typeface="Estrangelo Edessa"/>
+        <a:font script="Syrj" typeface="Estrangelo Edessa"/>
+        <a:font script="Syre" typeface="Estrangelo Edessa"/>
+        <a:font script="Sora" typeface="Nirmala UI"/>
+        <a:font script="Tale" typeface="Microsoft Tai Le"/>
+        <a:font script="Talu" typeface="Microsoft New Tai Lue"/>
+        <a:font script="Tfng" typeface="Ebrima"/>
+      </a:majorFont>
+      <a:minorFont>
+        <a:latin typeface="Aptos" panose="02110004020202020204"/>
+        <a:ea typeface=""/>
+        <a:cs typeface=""/>
+        <a:font script="Jpan" typeface="游ゴシック"/>
+        <a:font script="Hang" typeface="맑은 고딕"/>
+        <a:font script="Hans" typeface="等线"/>
+        <a:font script="Hant" typeface="新細明體"/>
+        <a:font script="Arab" typeface="Arial"/>
+        <a:font script="Hebr" typeface="Arial"/>
+        <a:font script="Thai" typeface="Cordia New"/>
+        <a:font script="Ethi" typeface="Nyala"/>
+        <a:font script="Beng" typeface="Vrinda"/>
+        <a:font script="Gujr" typeface="Shruti"/>
+        <a:font script="Khmr" typeface="DaunPenh"/>
+        <a:font script="Knda" typeface="Tunga"/>
+        <a:font script="Guru" typeface="Raavi"/>
+        <a:font script="Cans" typeface="Euphemia"/>
+        <a:font script="Cher" typeface="Plantagenet Cherokee"/>
+        <a:font script="Yiii" typeface="Microsoft Yi Baiti"/>
+        <a:font script="Tibt" typeface="Microsoft Himalaya"/>
+        <a:font script="Thaa" typeface="MV Boli"/>
+        <a:font script="Deva" typeface="Mangal"/>
+        <a:font script="Telu" typeface="Gautami"/>
+        <a:font script="Taml" typeface="Latha"/>
+        <a:font script="Syrc" typeface="Estrangelo Edessa"/>
+        <a:font script="Orya" typeface="Kalinga"/>
+        <a:font script="Mlym" typeface="Kartika"/>
+        <a:font script="Laoo" typeface="DokChampa"/>
+        <a:font script="Sinh" typeface="Iskoola Pota"/>
+        <a:font script="Mong" typeface="Mongolian Baiti"/>
+        <a:font script="Viet" typeface="Arial"/>
+        <a:font script="Uigh" typeface="Microsoft Uighur"/>
+        <a:font script="Geor" typeface="Sylfaen"/>
+        <a:font script="Armn" typeface="Arial"/>
+        <a:font script="Bugi" typeface="Leelawadee UI"/>
+        <a:font script="Bopo" typeface="Microsoft JhengHei"/>
+        <a:font script="Java" typeface="Javanese Text"/>
+        <a:font script="Lisu" typeface="Segoe UI"/>
+        <a:font script="Mymr" typeface="Myanmar Text"/>
+        <a:font script="Nkoo" typeface="Ebrima"/>
+        <a:font script="Olck" typeface="Nirmala UI"/>
+        <a:font script="Osma" typeface="Ebrima"/>
+        <a:font script="Phag" typeface="Phagspa"/>
+        <a:font script="Syrn" typeface="Estrangelo Edessa"/>
+        <a:font script="Syrj" typeface="Estrangelo Edessa"/>
+        <a:font script="Syre" typeface="Estrangelo Edessa"/>
+        <a:font script="Sora" typeface="Nirmala UI"/>
+        <a:font script="Tale" typeface="Microsoft Tai Le"/>
+        <a:font script="Talu" typeface="Microsoft New Tai Lue"/>
+        <a:font script="Tfng" typeface="Ebrima"/>
+      </a:minorFont>
+    </a:fontScheme>
+    <a:fmtScheme name="Office">
+      <a:fillStyleLst>
+        <a:solidFill>
+          <a:schemeClr val="phClr"/>
+        </a:solidFill>
+        <a:gradFill rotWithShape="1">
+          <a:gsLst>
+            <a:gs pos="0">
+              <a:schemeClr val="phClr">
+                <a:lumMod val="110000"/>
+                <a:satMod val="105000"/>
+                <a:tint val="67000"/>
+              </a:schemeClr>
+            </a:gs>
+            <a:gs pos="50000">
+              <a:schemeClr val="phClr">
+                <a:lumMod val="105000"/>
+                <a:satMod val="103000"/>
+                <a:tint val="73000"/>
+              </a:schemeClr>
+            </a:gs>
+            <a:gs pos="100000">
+              <a:schemeClr val="phClr">
+                <a:lumMod val="105000"/>
+                <a:satMod val="109000"/>
+                <a:tint val="81000"/>
+              </a:schemeClr>
+            </a:gs>
+          </a:gsLst>
+          <a:lin ang="5400000" scaled="0"/>
+        </a:gradFill>
+        <a:gradFill rotWithShape="1">
+          <a:gsLst>
+            <a:gs pos="0">
+              <a:schemeClr val="phClr">
+                <a:satMod val="103000"/>
+                <a:lumMod val="102000"/>
+                <a:tint val="94000"/>
+              </a:schemeClr>
+            </a:gs>
+            <a:gs pos="50000">
+              <a:schemeClr val="phClr">
+                <a:satMod val="110000"/>
+                <a:lumMod val="100000"/>
+                <a:shade val="100000"/>
+              </a:schemeClr>
+            </a:gs>
+            <a:gs pos="100000">
+              <a:schemeClr val="phClr">
+                <a:lumMod val="99000"/>
+                <a:satMod val="120000"/>
+                <a:shade val="78000"/>
+              </a:schemeClr>
+            </a:gs>
+          </a:gsLst>
+          <a:lin ang="5400000" scaled="0"/>
+        </a:gradFill>
+      </a:fillStyleLst>
+      <a:lnStyleLst>
+        <a:ln w="12700" cap="flat" cmpd="sng" algn="ctr">
+          <a:solidFill>
+            <a:schemeClr val="phClr"/>
+          </a:solidFill>
+          <a:prstDash val="solid"/>
+          <a:miter lim="800000"/>
+        </a:ln>
+        <a:ln w="19050" cap="flat" cmpd="sng" algn="ctr">
+          <a:solidFill>
+            <a:schemeClr val="phClr"/>
+          </a:solidFill>
+          <a:prstDash val="solid"/>
+          <a:miter lim="800000"/>
+        </a:ln>
+        <a:ln w="25400" cap="flat" cmpd="sng" algn="ctr">
+          <a:solidFill>
+            <a:schemeClr val="phClr"/>
+          </a:solidFill>
+          <a:prstDash val="solid"/>
+          <a:miter lim="800000"/>
+        </a:ln>
+      </a:lnStyleLst>
+      <a:effectStyleLst>
+        <a:effectStyle>
+          <a:effectLst/>
+        </a:effectStyle>
+        <a:effectStyle>
+          <a:effectLst/>
+        </a:effectStyle>
+        <a:effectStyle>
+          <a:effectLst>
+            <a:outerShdw blurRad="57150" dist="19050" dir="5400000" algn="ctr" rotWithShape="0">
+              <a:srgbClr val="000000">
+                <a:alpha val="63000"/>
+              </a:srgbClr>
+            </a:outerShdw>
+          </a:effectLst>
+        </a:effectStyle>
+      </a:effectStyleLst>
+      <a:bgFillStyleLst>
+        <a:solidFill>
+          <a:schemeClr val="phClr"/>
+        </a:solidFill>
+        <a:solidFill>
+          <a:schemeClr val="phClr">
+            <a:tint val="95000"/>
+            <a:satMod val="170000"/>
+          </a:schemeClr>
+        </a:solidFill>
+        <a:gradFill rotWithShape="1">
+          <a:gsLst>
+            <a:gs pos="0">
+              <a:schemeClr val="phClr">
+                <a:tint val="93000"/>
+                <a:satMod val="150000"/>
+                <a:shade val="98000"/>
+                <a:lumMod val="102000"/>
+              </a:schemeClr>
+            </a:gs>
+            <a:gs pos="50000">
+              <a:schemeClr val="phClr">
+                <a:tint val="98000"/>
+                <a:satMod val="130000"/>
+                <a:shade val="90000"/>
+                <a:lumMod val="103000"/>
+              </a:schemeClr>
+            </a:gs>
+            <a:gs pos="100000">
+              <a:schemeClr val="phClr">
+                <a:shade val="63000"/>
+                <a:satMod val="120000"/>
+              </a:schemeClr>
+            </a:gs>
+          </a:gsLst>
+          <a:lin ang="5400000" scaled="0"/>
+        </a:gradFill>
+      </a:bgFillStyleLst>
+    </a:fmtScheme>
+  </a:themeElements>
+  <a:objectDefaults>
+    <a:lnDef>
+      <a:spPr/>
+      <a:bodyPr/>
+      <a:lstStyle/>
+      <a:style>
+        <a:lnRef idx="2">
+          <a:schemeClr val="accent1"/>
+        </a:lnRef>
+        <a:fillRef idx="0">
+          <a:schemeClr val="accent1"/>
+        </a:fillRef>
+        <a:effectRef idx="1">
+          <a:schemeClr val="accent1"/>
+        </a:effectRef>
+        <a:fontRef idx="minor">
+          <a:schemeClr val="tx1"/>
+        </a:fontRef>
+      </a:style>
+    </a:lnDef>
+  </a:objectDefaults>
+  <a:extraClrSchemeLst/>
+  <a:extLst>
+    <a:ext uri="{05A4C25C-085E-4340-85A3-A5531E510DB2}">
+      <thm15:themeFamily xmlns:thm15="http://schemas.microsoft.com/office/thememl/2012/main" name="Office Theme" id="{2E142A2C-CD16-42D6-873A-C26D2A0506FA}" vid="{1BDDFF52-6CD6-40A5-AB3C-68EB2F1E4D0A}"/>
+    </a:ext>
+  </a:extLst>
+</a:theme>
 </file>